--- a/knf/decks/d4p2.pptx
+++ b/knf/decks/d4p2.pptx
@@ -3783,7 +3783,7 @@
                 <a:ea typeface="Pretendard"/>
                 <a:cs typeface="Pretendard"/>
               </a:rPr>
-              <a:t>이 45분이 끝날 때 확인할 것</a:t>
+              <a:t>이 50분이 끝날 때 확인할 것</a:t>
             </a:r>
           </a:p>
         </p:txBody>
@@ -5506,7 +5506,7 @@
                 <a:ea typeface="Pretendard"/>
                 <a:cs typeface="Pretendard"/>
               </a:rPr>
-              <a:t>45분 뒤에는</a:t>
+              <a:t>50분 뒤에는</a:t>
             </a:r>
           </a:p>
         </p:txBody>

--- a/knf/decks/d4p2.pptx
+++ b/knf/decks/d4p2.pptx
@@ -3100,7 +3100,7 @@
       <p:grpSpPr/>
       <p:sp>
         <p:nvSpPr>
-          <p:cNvPr id="2" name="Oval 1"/>
+          <p:cNvPr id="2" name="deckgen:decor"/>
           <p:cNvSpPr/>
           <p:nvPr/>
         </p:nvSpPr>
@@ -3130,7 +3130,7 @@
       </p:sp>
       <p:sp>
         <p:nvSpPr>
-          <p:cNvPr id="3" name="Oval 2"/>
+          <p:cNvPr id="3" name="deckgen:decor"/>
           <p:cNvSpPr/>
           <p:nvPr/>
         </p:nvSpPr>
@@ -3160,7 +3160,7 @@
       </p:sp>
       <p:sp>
         <p:nvSpPr>
-          <p:cNvPr id="4" name="Oval 3"/>
+          <p:cNvPr id="4" name="deckgen:decor"/>
           <p:cNvSpPr/>
           <p:nvPr/>
         </p:nvSpPr>
@@ -3190,7 +3190,7 @@
       </p:sp>
       <p:sp>
         <p:nvSpPr>
-          <p:cNvPr id="5" name="Rectangle 4"/>
+          <p:cNvPr id="5" name="deckgen:decor"/>
           <p:cNvSpPr/>
           <p:nvPr/>
         </p:nvSpPr>
@@ -3220,7 +3220,7 @@
       </p:sp>
       <p:sp>
         <p:nvSpPr>
-          <p:cNvPr id="6" name="Oval 5"/>
+          <p:cNvPr id="6" name="deckgen:decor"/>
           <p:cNvSpPr/>
           <p:nvPr/>
         </p:nvSpPr>
@@ -3250,7 +3250,7 @@
       </p:sp>
       <p:sp>
         <p:nvSpPr>
-          <p:cNvPr id="7" name="Oval 6"/>
+          <p:cNvPr id="7" name="deckgen:decor"/>
           <p:cNvSpPr/>
           <p:nvPr/>
         </p:nvSpPr>
@@ -3280,7 +3280,7 @@
       </p:sp>
       <p:sp>
         <p:nvSpPr>
-          <p:cNvPr id="8" name="Oval 7"/>
+          <p:cNvPr id="8" name="deckgen:decor"/>
           <p:cNvSpPr/>
           <p:nvPr/>
         </p:nvSpPr>
@@ -3310,7 +3310,7 @@
       </p:sp>
       <p:sp>
         <p:nvSpPr>
-          <p:cNvPr id="9" name="Oval 8"/>
+          <p:cNvPr id="9" name="deckgen:decor"/>
           <p:cNvSpPr/>
           <p:nvPr/>
         </p:nvSpPr>
@@ -3340,7 +3340,7 @@
       </p:sp>
       <p:sp>
         <p:nvSpPr>
-          <p:cNvPr id="10" name="Rectangle 9"/>
+          <p:cNvPr id="10" name="deckgen:decor"/>
           <p:cNvSpPr/>
           <p:nvPr/>
         </p:nvSpPr>
@@ -3618,7 +3618,7 @@
       <p:grpSpPr/>
       <p:sp>
         <p:nvSpPr>
-          <p:cNvPr id="2" name="Oval 1"/>
+          <p:cNvPr id="2" name="deckgen:decor"/>
           <p:cNvSpPr/>
           <p:nvPr/>
         </p:nvSpPr>
@@ -3648,7 +3648,7 @@
       </p:sp>
       <p:sp>
         <p:nvSpPr>
-          <p:cNvPr id="3" name="Oval 2"/>
+          <p:cNvPr id="3" name="deckgen:decor"/>
           <p:cNvSpPr/>
           <p:nvPr/>
         </p:nvSpPr>
@@ -3678,7 +3678,7 @@
       </p:sp>
       <p:sp>
         <p:nvSpPr>
-          <p:cNvPr id="4" name="Oval 3"/>
+          <p:cNvPr id="4" name="deckgen:decor"/>
           <p:cNvSpPr/>
           <p:nvPr/>
         </p:nvSpPr>
@@ -4534,7 +4534,7 @@
       <p:grpSpPr/>
       <p:sp>
         <p:nvSpPr>
-          <p:cNvPr id="2" name="Oval 1"/>
+          <p:cNvPr id="2" name="deckgen:decor"/>
           <p:cNvSpPr/>
           <p:nvPr/>
         </p:nvSpPr>
@@ -4564,7 +4564,7 @@
       </p:sp>
       <p:sp>
         <p:nvSpPr>
-          <p:cNvPr id="3" name="Oval 2"/>
+          <p:cNvPr id="3" name="deckgen:decor"/>
           <p:cNvSpPr/>
           <p:nvPr/>
         </p:nvSpPr>
@@ -5341,7 +5341,7 @@
       <p:grpSpPr/>
       <p:sp>
         <p:nvSpPr>
-          <p:cNvPr id="2" name="Oval 1"/>
+          <p:cNvPr id="2" name="deckgen:decor"/>
           <p:cNvSpPr/>
           <p:nvPr/>
         </p:nvSpPr>
@@ -5371,7 +5371,7 @@
       </p:sp>
       <p:sp>
         <p:nvSpPr>
-          <p:cNvPr id="3" name="Oval 2"/>
+          <p:cNvPr id="3" name="deckgen:decor"/>
           <p:cNvSpPr/>
           <p:nvPr/>
         </p:nvSpPr>
@@ -5401,7 +5401,7 @@
       </p:sp>
       <p:sp>
         <p:nvSpPr>
-          <p:cNvPr id="4" name="Oval 3"/>
+          <p:cNvPr id="4" name="deckgen:decor"/>
           <p:cNvSpPr/>
           <p:nvPr/>
         </p:nvSpPr>
@@ -6186,7 +6186,7 @@
       <p:grpSpPr/>
       <p:sp>
         <p:nvSpPr>
-          <p:cNvPr id="2" name="Oval 1"/>
+          <p:cNvPr id="2" name="deckgen:decor"/>
           <p:cNvSpPr/>
           <p:nvPr/>
         </p:nvSpPr>
@@ -6216,7 +6216,7 @@
       </p:sp>
       <p:sp>
         <p:nvSpPr>
-          <p:cNvPr id="3" name="Oval 2"/>
+          <p:cNvPr id="3" name="deckgen:decor"/>
           <p:cNvSpPr/>
           <p:nvPr/>
         </p:nvSpPr>
@@ -6246,7 +6246,7 @@
       </p:sp>
       <p:sp>
         <p:nvSpPr>
-          <p:cNvPr id="4" name="Oval 3"/>
+          <p:cNvPr id="4" name="deckgen:decor"/>
           <p:cNvSpPr/>
           <p:nvPr/>
         </p:nvSpPr>
@@ -7743,7 +7743,7 @@
       <p:grpSpPr/>
       <p:sp>
         <p:nvSpPr>
-          <p:cNvPr id="2" name="Oval 1"/>
+          <p:cNvPr id="2" name="deckgen:decor"/>
           <p:cNvSpPr/>
           <p:nvPr/>
         </p:nvSpPr>
@@ -7773,7 +7773,7 @@
       </p:sp>
       <p:sp>
         <p:nvSpPr>
-          <p:cNvPr id="3" name="Oval 2"/>
+          <p:cNvPr id="3" name="deckgen:decor"/>
           <p:cNvSpPr/>
           <p:nvPr/>
         </p:nvSpPr>
@@ -7803,7 +7803,7 @@
       </p:sp>
       <p:sp>
         <p:nvSpPr>
-          <p:cNvPr id="4" name="Oval 3"/>
+          <p:cNvPr id="4" name="deckgen:decor"/>
           <p:cNvSpPr/>
           <p:nvPr/>
         </p:nvSpPr>
@@ -9300,7 +9300,7 @@
       <p:grpSpPr/>
       <p:sp>
         <p:nvSpPr>
-          <p:cNvPr id="2" name="Oval 1"/>
+          <p:cNvPr id="2" name="deckgen:decor"/>
           <p:cNvSpPr/>
           <p:nvPr/>
         </p:nvSpPr>
@@ -9330,7 +9330,7 @@
       </p:sp>
       <p:sp>
         <p:nvSpPr>
-          <p:cNvPr id="3" name="Oval 2"/>
+          <p:cNvPr id="3" name="deckgen:decor"/>
           <p:cNvSpPr/>
           <p:nvPr/>
         </p:nvSpPr>
@@ -9360,7 +9360,7 @@
       </p:sp>
       <p:sp>
         <p:nvSpPr>
-          <p:cNvPr id="4" name="Oval 3"/>
+          <p:cNvPr id="4" name="deckgen:decor"/>
           <p:cNvSpPr/>
           <p:nvPr/>
         </p:nvSpPr>
@@ -10493,7 +10493,7 @@
       <p:grpSpPr/>
       <p:sp>
         <p:nvSpPr>
-          <p:cNvPr id="2" name="Oval 1"/>
+          <p:cNvPr id="2" name="deckgen:decor"/>
           <p:cNvSpPr/>
           <p:nvPr/>
         </p:nvSpPr>
@@ -10523,7 +10523,7 @@
       </p:sp>
       <p:sp>
         <p:nvSpPr>
-          <p:cNvPr id="3" name="Oval 2"/>
+          <p:cNvPr id="3" name="deckgen:decor"/>
           <p:cNvSpPr/>
           <p:nvPr/>
         </p:nvSpPr>
@@ -10553,7 +10553,7 @@
       </p:sp>
       <p:sp>
         <p:nvSpPr>
-          <p:cNvPr id="4" name="Oval 3"/>
+          <p:cNvPr id="4" name="deckgen:decor"/>
           <p:cNvSpPr/>
           <p:nvPr/>
         </p:nvSpPr>
@@ -11573,7 +11573,7 @@
       <p:grpSpPr/>
       <p:sp>
         <p:nvSpPr>
-          <p:cNvPr id="2" name="Oval 1"/>
+          <p:cNvPr id="2" name="deckgen:decor"/>
           <p:cNvSpPr/>
           <p:nvPr/>
         </p:nvSpPr>
@@ -11603,7 +11603,7 @@
       </p:sp>
       <p:sp>
         <p:nvSpPr>
-          <p:cNvPr id="3" name="Oval 2"/>
+          <p:cNvPr id="3" name="deckgen:decor"/>
           <p:cNvSpPr/>
           <p:nvPr/>
         </p:nvSpPr>
@@ -11633,7 +11633,7 @@
       </p:sp>
       <p:sp>
         <p:nvSpPr>
-          <p:cNvPr id="4" name="Oval 3"/>
+          <p:cNvPr id="4" name="deckgen:decor"/>
           <p:cNvSpPr/>
           <p:nvPr/>
         </p:nvSpPr>
@@ -11839,7 +11839,7 @@
       </p:sp>
       <p:sp>
         <p:nvSpPr>
-          <p:cNvPr id="10" name="TextBox 9"/>
+          <p:cNvPr id="10" name="deckgen:ornament"/>
           <p:cNvSpPr txBox="1"/>
           <p:nvPr/>
         </p:nvSpPr>
@@ -12024,7 +12024,7 @@
       </p:sp>
       <p:sp>
         <p:nvSpPr>
-          <p:cNvPr id="14" name="TextBox 13"/>
+          <p:cNvPr id="14" name="deckgen:ornament"/>
           <p:cNvSpPr txBox="1"/>
           <p:nvPr/>
         </p:nvSpPr>
@@ -12209,7 +12209,7 @@
       </p:sp>
       <p:sp>
         <p:nvSpPr>
-          <p:cNvPr id="18" name="TextBox 17"/>
+          <p:cNvPr id="18" name="deckgen:ornament"/>
           <p:cNvSpPr txBox="1"/>
           <p:nvPr/>
         </p:nvSpPr>
@@ -12531,7 +12531,7 @@
       <p:grpSpPr/>
       <p:sp>
         <p:nvSpPr>
-          <p:cNvPr id="2" name="Oval 1"/>
+          <p:cNvPr id="2" name="deckgen:decor"/>
           <p:cNvSpPr/>
           <p:nvPr/>
         </p:nvSpPr>
@@ -12561,7 +12561,7 @@
       </p:sp>
       <p:sp>
         <p:nvSpPr>
-          <p:cNvPr id="3" name="Oval 2"/>
+          <p:cNvPr id="3" name="deckgen:decor"/>
           <p:cNvSpPr/>
           <p:nvPr/>
         </p:nvSpPr>
@@ -12591,7 +12591,7 @@
       </p:sp>
       <p:sp>
         <p:nvSpPr>
-          <p:cNvPr id="4" name="Oval 3"/>
+          <p:cNvPr id="4" name="deckgen:decor"/>
           <p:cNvSpPr/>
           <p:nvPr/>
         </p:nvSpPr>
@@ -14988,7 +14988,7 @@
       <p:grpSpPr/>
       <p:sp>
         <p:nvSpPr>
-          <p:cNvPr id="2" name="Oval 1"/>
+          <p:cNvPr id="2" name="deckgen:decor"/>
           <p:cNvSpPr/>
           <p:nvPr/>
         </p:nvSpPr>
@@ -15018,7 +15018,7 @@
       </p:sp>
       <p:sp>
         <p:nvSpPr>
-          <p:cNvPr id="3" name="Oval 2"/>
+          <p:cNvPr id="3" name="deckgen:decor"/>
           <p:cNvSpPr/>
           <p:nvPr/>
         </p:nvSpPr>
@@ -15048,7 +15048,7 @@
       </p:sp>
       <p:sp>
         <p:nvSpPr>
-          <p:cNvPr id="4" name="Oval 3"/>
+          <p:cNvPr id="4" name="deckgen:decor"/>
           <p:cNvSpPr/>
           <p:nvPr/>
         </p:nvSpPr>
